--- a/AI02-Types.pptx
+++ b/AI02-Types.pptx
@@ -5379,15 +5379,7 @@
           <a:p>
             <a:r>
               <a:rPr lang="fr-FR" dirty="0"/>
-              <a:t>Moyens </a:t>
-            </a:r>
-            <a:r>
-              <a:rPr lang="fr-FR" dirty="0" err="1"/>
-              <a:t>financié</a:t>
-            </a:r>
-            <a:r>
-              <a:rPr lang="fr-FR" dirty="0"/>
-              <a:t> ++</a:t>
+              <a:t>Moyens financiers ++</a:t>
             </a:r>
           </a:p>
           <a:p>
